--- a/assets/ORDIA_紹介資料.pptx
+++ b/assets/ORDIA_紹介資料.pptx
@@ -16406,6 +16406,55 @@
           </a:p>
         </p:txBody>
       </p:sp>
+      <p:sp>
+        <p:nvSpPr>
+          <p:cNvPr id="40" name="テキスト ボックス 39">
+            <a:extLst>
+              <a:ext uri="{FF2B5EF4-FFF2-40B4-BE49-F238E27FC236}">
+                <a16:creationId xmlns:a16="http://schemas.microsoft.com/office/drawing/2014/main" id="{6A2DC837-133F-0A73-4DDB-35DAE7362AAC}"/>
+              </a:ext>
+            </a:extLst>
+          </p:cNvPr>
+          <p:cNvSpPr txBox="1"/>
+          <p:nvPr/>
+        </p:nvSpPr>
+        <p:spPr>
+          <a:xfrm>
+            <a:off x="304800" y="4711700"/>
+            <a:ext cx="8534400" cy="246221"/>
+          </a:xfrm>
+          <a:prstGeom prst="rect">
+            <a:avLst/>
+          </a:prstGeom>
+          <a:noFill/>
+        </p:spPr>
+        <p:txBody>
+          <a:bodyPr vert="horz" wrap="square" rtlCol="0">
+            <a:spAutoFit/>
+          </a:bodyPr>
+          <a:lstStyle/>
+          <a:p>
+            <a:r>
+              <a:rPr kumimoji="1" lang="en-US" altLang="ja-JP" sz="1000">
+                <a:solidFill>
+                  <a:srgbClr val="575757"/>
+                </a:solidFill>
+                <a:latin typeface="Meiryo" panose="020B0604030504040204" pitchFamily="50" charset="-128"/>
+              </a:rPr>
+              <a:t>※</a:t>
+            </a:r>
+            <a:r>
+              <a:rPr kumimoji="1" lang="ja-JP" altLang="en-US" sz="1000">
+                <a:solidFill>
+                  <a:srgbClr val="575757"/>
+                </a:solidFill>
+                <a:latin typeface="Meiryo" panose="020B0604030504040204" pitchFamily="50" charset="-128"/>
+              </a:rPr>
+              <a:t>基幹システムとの連携は別途お見積りになりますので、お問い合わせください。</a:t>
+            </a:r>
+          </a:p>
+        </p:txBody>
+      </p:sp>
     </p:spTree>
   </p:cSld>
   <p:clrMapOvr>
@@ -17705,6 +17754,55 @@
           </a:p>
         </p:txBody>
       </p:sp>
+      <p:sp>
+        <p:nvSpPr>
+          <p:cNvPr id="10" name="テキスト ボックス 9">
+            <a:extLst>
+              <a:ext uri="{FF2B5EF4-FFF2-40B4-BE49-F238E27FC236}">
+                <a16:creationId xmlns:a16="http://schemas.microsoft.com/office/drawing/2014/main" id="{951ACB51-AFBD-5233-016C-FCF12F26CDA5}"/>
+              </a:ext>
+            </a:extLst>
+          </p:cNvPr>
+          <p:cNvSpPr txBox="1"/>
+          <p:nvPr/>
+        </p:nvSpPr>
+        <p:spPr>
+          <a:xfrm>
+            <a:off x="304800" y="4711700"/>
+            <a:ext cx="8534400" cy="246221"/>
+          </a:xfrm>
+          <a:prstGeom prst="rect">
+            <a:avLst/>
+          </a:prstGeom>
+          <a:noFill/>
+        </p:spPr>
+        <p:txBody>
+          <a:bodyPr vert="horz" wrap="square" rtlCol="0">
+            <a:spAutoFit/>
+          </a:bodyPr>
+          <a:lstStyle/>
+          <a:p>
+            <a:r>
+              <a:rPr kumimoji="1" lang="en-US" altLang="ja-JP" sz="1000">
+                <a:solidFill>
+                  <a:srgbClr val="575757"/>
+                </a:solidFill>
+                <a:latin typeface="Meiryo" panose="020B0604030504040204" pitchFamily="50" charset="-128"/>
+              </a:rPr>
+              <a:t>※</a:t>
+            </a:r>
+            <a:r>
+              <a:rPr kumimoji="1" lang="ja-JP" altLang="en-US" sz="1000">
+                <a:solidFill>
+                  <a:srgbClr val="575757"/>
+                </a:solidFill>
+                <a:latin typeface="Meiryo" panose="020B0604030504040204" pitchFamily="50" charset="-128"/>
+              </a:rPr>
+              <a:t>基幹システムとのデータ連携は別途お見積りになりますので、お問い合わせください。</a:t>
+            </a:r>
+          </a:p>
+        </p:txBody>
+      </p:sp>
     </p:spTree>
   </p:cSld>
   <p:clrMapOvr>

--- a/assets/ORDIA_紹介資料.pptx
+++ b/assets/ORDIA_紹介資料.pptx
@@ -16350,8 +16350,8 @@
         </p:nvSpPr>
         <p:spPr>
           <a:xfrm>
-            <a:off x="365760" y="4389120"/>
-            <a:ext cx="8412480" cy="411480"/>
+            <a:off x="365760" y="4241800"/>
+            <a:ext cx="8412480" cy="381000"/>
           </a:xfrm>
           <a:prstGeom prst="rect">
             <a:avLst/>
@@ -16408,10 +16408,10 @@
       </p:sp>
       <p:sp>
         <p:nvSpPr>
-          <p:cNvPr id="40" name="テキスト ボックス 39">
+          <p:cNvPr id="41" name="テキスト ボックス 40">
             <a:extLst>
               <a:ext uri="{FF2B5EF4-FFF2-40B4-BE49-F238E27FC236}">
-                <a16:creationId xmlns:a16="http://schemas.microsoft.com/office/drawing/2014/main" id="{6A2DC837-133F-0A73-4DDB-35DAE7362AAC}"/>
+                <a16:creationId xmlns:a16="http://schemas.microsoft.com/office/drawing/2014/main" id="{E2D4EE2D-2C81-2597-AB5A-3CB41239ED17}"/>
               </a:ext>
             </a:extLst>
           </p:cNvPr>
@@ -16420,33 +16420,33 @@
         </p:nvSpPr>
         <p:spPr>
           <a:xfrm>
-            <a:off x="304800" y="4711700"/>
-            <a:ext cx="8534400" cy="246221"/>
-          </a:xfrm>
-          <a:prstGeom prst="rect">
-            <a:avLst/>
-          </a:prstGeom>
-          <a:noFill/>
-        </p:spPr>
-        <p:txBody>
-          <a:bodyPr vert="horz" wrap="square" rtlCol="0">
+            <a:off x="368300" y="4648200"/>
+            <a:ext cx="8407400" cy="123111"/>
+          </a:xfrm>
+          <a:prstGeom prst="rect">
+            <a:avLst/>
+          </a:prstGeom>
+          <a:noFill/>
+        </p:spPr>
+        <p:txBody>
+          <a:bodyPr vert="horz" wrap="square" tIns="0" bIns="0" rtlCol="0">
             <a:spAutoFit/>
           </a:bodyPr>
           <a:lstStyle/>
           <a:p>
             <a:r>
-              <a:rPr kumimoji="1" lang="en-US" altLang="ja-JP" sz="1000">
-                <a:solidFill>
-                  <a:srgbClr val="575757"/>
+              <a:rPr kumimoji="1" lang="en-US" altLang="ja-JP" sz="800">
+                <a:solidFill>
+                  <a:srgbClr val="757575"/>
                 </a:solidFill>
                 <a:latin typeface="Meiryo" panose="020B0604030504040204" pitchFamily="50" charset="-128"/>
               </a:rPr>
               <a:t>※</a:t>
             </a:r>
             <a:r>
-              <a:rPr kumimoji="1" lang="ja-JP" altLang="en-US" sz="1000">
-                <a:solidFill>
-                  <a:srgbClr val="575757"/>
+              <a:rPr kumimoji="1" lang="ja-JP" altLang="en-US" sz="800">
+                <a:solidFill>
+                  <a:srgbClr val="757575"/>
                 </a:solidFill>
                 <a:latin typeface="Meiryo" panose="020B0604030504040204" pitchFamily="50" charset="-128"/>
               </a:rPr>
@@ -17723,7 +17723,7 @@
         </p:nvSpPr>
         <p:spPr>
           <a:xfrm>
-            <a:off x="365760" y="4572000"/>
+            <a:off x="365760" y="4292600"/>
             <a:ext cx="8412480" cy="201168"/>
           </a:xfrm>
           <a:prstGeom prst="rect">
@@ -17733,7 +17733,9 @@
           <a:ln/>
         </p:spPr>
         <p:txBody>
-          <a:bodyPr wrap="square" lIns="0" tIns="0" rIns="0" bIns="0" rtlCol="0" anchor="ctr"/>
+          <a:bodyPr wrap="square" lIns="0" tIns="0" rIns="0" bIns="0" rtlCol="0" anchor="ctr">
+            <a:noAutofit/>
+          </a:bodyPr>
           <a:lstStyle/>
           <a:p>
             <a:pPr marL="0" indent="0" algn="ctr">
@@ -17756,10 +17758,10 @@
       </p:sp>
       <p:sp>
         <p:nvSpPr>
-          <p:cNvPr id="10" name="テキスト ボックス 9">
+          <p:cNvPr id="11" name="テキスト ボックス 10">
             <a:extLst>
               <a:ext uri="{FF2B5EF4-FFF2-40B4-BE49-F238E27FC236}">
-                <a16:creationId xmlns:a16="http://schemas.microsoft.com/office/drawing/2014/main" id="{951ACB51-AFBD-5233-016C-FCF12F26CDA5}"/>
+                <a16:creationId xmlns:a16="http://schemas.microsoft.com/office/drawing/2014/main" id="{93C5B16B-824E-8501-E1B3-FBD61647643B}"/>
               </a:ext>
             </a:extLst>
           </p:cNvPr>
@@ -17768,33 +17770,33 @@
         </p:nvSpPr>
         <p:spPr>
           <a:xfrm>
-            <a:off x="304800" y="4711700"/>
-            <a:ext cx="8534400" cy="246221"/>
-          </a:xfrm>
-          <a:prstGeom prst="rect">
-            <a:avLst/>
-          </a:prstGeom>
-          <a:noFill/>
-        </p:spPr>
-        <p:txBody>
-          <a:bodyPr vert="horz" wrap="square" rtlCol="0">
+            <a:off x="368300" y="4648200"/>
+            <a:ext cx="8407400" cy="123111"/>
+          </a:xfrm>
+          <a:prstGeom prst="rect">
+            <a:avLst/>
+          </a:prstGeom>
+          <a:noFill/>
+        </p:spPr>
+        <p:txBody>
+          <a:bodyPr vert="horz" wrap="square" tIns="0" bIns="0" rtlCol="0">
             <a:spAutoFit/>
           </a:bodyPr>
           <a:lstStyle/>
           <a:p>
             <a:r>
-              <a:rPr kumimoji="1" lang="en-US" altLang="ja-JP" sz="1000">
-                <a:solidFill>
-                  <a:srgbClr val="575757"/>
+              <a:rPr kumimoji="1" lang="en-US" altLang="ja-JP" sz="800">
+                <a:solidFill>
+                  <a:srgbClr val="757575"/>
                 </a:solidFill>
                 <a:latin typeface="Meiryo" panose="020B0604030504040204" pitchFamily="50" charset="-128"/>
               </a:rPr>
               <a:t>※</a:t>
             </a:r>
             <a:r>
-              <a:rPr kumimoji="1" lang="ja-JP" altLang="en-US" sz="1000">
-                <a:solidFill>
-                  <a:srgbClr val="575757"/>
+              <a:rPr kumimoji="1" lang="ja-JP" altLang="en-US" sz="800">
+                <a:solidFill>
+                  <a:srgbClr val="757575"/>
                 </a:solidFill>
                 <a:latin typeface="Meiryo" panose="020B0604030504040204" pitchFamily="50" charset="-128"/>
               </a:rPr>

--- a/assets/ORDIA_紹介資料.pptx
+++ b/assets/ORDIA_紹介資料.pptx
@@ -16369,45 +16369,6 @@
       </p:sp>
       <p:sp>
         <p:nvSpPr>
-          <p:cNvPr id="39" name="Text 36"/>
-          <p:cNvSpPr/>
-          <p:nvPr/>
-        </p:nvSpPr>
-        <p:spPr>
-          <a:xfrm>
-            <a:off x="502920" y="4389120"/>
-            <a:ext cx="8275320" cy="411480"/>
-          </a:xfrm>
-          <a:prstGeom prst="rect">
-            <a:avLst/>
-          </a:prstGeom>
-          <a:noFill/>
-          <a:ln/>
-        </p:spPr>
-        <p:txBody>
-          <a:bodyPr wrap="square" lIns="0" tIns="0" rIns="0" bIns="0" rtlCol="0" anchor="ctr"/>
-          <a:lstStyle/>
-          <a:p>
-            <a:pPr marL="0" indent="0" algn="l">
-              <a:buNone/>
-            </a:pPr>
-            <a:r>
-              <a:rPr lang="en-US" sz="1100" b="1" dirty="0">
-                <a:solidFill>
-                  <a:srgbClr val="1E3A5F"/>
-                </a:solidFill>
-                <a:latin typeface="Meiryo UI" pitchFamily="34" charset="0"/>
-                <a:ea typeface="Meiryo UI" pitchFamily="34" charset="-122"/>
-                <a:cs typeface="Meiryo UI" pitchFamily="34" charset="-120"/>
-              </a:rPr>
-              <a:t>AI読み取り＋マスター統合＋基幹連携。3つが揃って、受注業務はまるごと自動化できる。</a:t>
-            </a:r>
-            <a:endParaRPr lang="en-US" sz="1100" dirty="0"/>
-          </a:p>
-        </p:txBody>
-      </p:sp>
-      <p:sp>
-        <p:nvSpPr>
           <p:cNvPr id="41" name="テキスト ボックス 40">
             <a:extLst>
               <a:ext uri="{FF2B5EF4-FFF2-40B4-BE49-F238E27FC236}">
@@ -16420,8 +16381,8 @@
         </p:nvSpPr>
         <p:spPr>
           <a:xfrm>
-            <a:off x="368300" y="4648200"/>
-            <a:ext cx="8407400" cy="123111"/>
+            <a:off x="551180" y="4365583"/>
+            <a:ext cx="8407400" cy="169277"/>
           </a:xfrm>
           <a:prstGeom prst="rect">
             <a:avLst/>
@@ -16435,7 +16396,7 @@
           <a:lstStyle/>
           <a:p>
             <a:r>
-              <a:rPr kumimoji="1" lang="en-US" altLang="ja-JP" sz="800">
+              <a:rPr kumimoji="1" lang="en-US" altLang="ja-JP" sz="1100" b="1" dirty="0">
                 <a:solidFill>
                   <a:srgbClr val="757575"/>
                 </a:solidFill>
@@ -16444,7 +16405,7 @@
               <a:t>※</a:t>
             </a:r>
             <a:r>
-              <a:rPr kumimoji="1" lang="ja-JP" altLang="en-US" sz="800">
+              <a:rPr kumimoji="1" lang="ja-JP" altLang="en-US" sz="1100" b="1" dirty="0">
                 <a:solidFill>
                   <a:srgbClr val="757575"/>
                 </a:solidFill>
@@ -16832,7 +16793,7 @@
         </p:nvGraphicFramePr>
         <p:xfrm>
           <a:off x="365760" y="1627632"/>
-          <a:ext cx="8412480" cy="914400"/>
+          <a:ext cx="8412480" cy="957072"/>
         </p:xfrm>
         <a:graphic>
           <a:graphicData uri="http://schemas.openxmlformats.org/drawingml/2006/table">
@@ -17717,47 +17678,6 @@
       </p:graphicFrame>
       <p:sp>
         <p:nvSpPr>
-          <p:cNvPr id="13" name="Text 8"/>
-          <p:cNvSpPr/>
-          <p:nvPr/>
-        </p:nvSpPr>
-        <p:spPr>
-          <a:xfrm>
-            <a:off x="365760" y="4292600"/>
-            <a:ext cx="8412480" cy="201168"/>
-          </a:xfrm>
-          <a:prstGeom prst="rect">
-            <a:avLst/>
-          </a:prstGeom>
-          <a:noFill/>
-          <a:ln/>
-        </p:spPr>
-        <p:txBody>
-          <a:bodyPr wrap="square" lIns="0" tIns="0" rIns="0" bIns="0" rtlCol="0" anchor="ctr">
-            <a:noAutofit/>
-          </a:bodyPr>
-          <a:lstStyle/>
-          <a:p>
-            <a:pPr marL="0" indent="0" algn="ctr">
-              <a:buNone/>
-            </a:pPr>
-            <a:r>
-              <a:rPr lang="en-US" sz="950" dirty="0">
-                <a:solidFill>
-                  <a:srgbClr val="64748B"/>
-                </a:solidFill>
-                <a:latin typeface="Meiryo UI" pitchFamily="34" charset="0"/>
-                <a:ea typeface="Meiryo UI" pitchFamily="34" charset="-122"/>
-                <a:cs typeface="Meiryo UI" pitchFamily="34" charset="-120"/>
-              </a:rPr>
-              <a:t>※ プラットフォーム共通の基盤料金はかかりません。料金は各モジュール単位。価格は税別。最終はお見積もりにて。</a:t>
-            </a:r>
-            <a:endParaRPr lang="en-US" sz="950" dirty="0"/>
-          </a:p>
-        </p:txBody>
-      </p:sp>
-      <p:sp>
-        <p:nvSpPr>
           <p:cNvPr id="11" name="テキスト ボックス 10">
             <a:extLst>
               <a:ext uri="{FF2B5EF4-FFF2-40B4-BE49-F238E27FC236}">
@@ -17770,8 +17690,8 @@
         </p:nvSpPr>
         <p:spPr>
           <a:xfrm>
-            <a:off x="368300" y="4648200"/>
-            <a:ext cx="8407400" cy="123111"/>
+            <a:off x="462280" y="4490037"/>
+            <a:ext cx="8407400" cy="169277"/>
           </a:xfrm>
           <a:prstGeom prst="rect">
             <a:avLst/>
@@ -17785,7 +17705,7 @@
           <a:lstStyle/>
           <a:p>
             <a:r>
-              <a:rPr kumimoji="1" lang="en-US" altLang="ja-JP" sz="800">
+              <a:rPr kumimoji="1" lang="en-US" altLang="ja-JP" sz="1100" b="1" dirty="0">
                 <a:solidFill>
                   <a:srgbClr val="757575"/>
                 </a:solidFill>
@@ -17794,7 +17714,7 @@
               <a:t>※</a:t>
             </a:r>
             <a:r>
-              <a:rPr kumimoji="1" lang="ja-JP" altLang="en-US" sz="800">
+              <a:rPr kumimoji="1" lang="ja-JP" altLang="en-US" sz="1100" b="1" dirty="0">
                 <a:solidFill>
                   <a:srgbClr val="757575"/>
                 </a:solidFill>

--- a/assets/ORDIA_紹介資料.pptx
+++ b/assets/ORDIA_紹介資料.pptx
@@ -2887,6 +2887,28 @@
               <a:buNone/>
             </a:pPr>
             <a:r>
+              <a:rPr lang="ja-JP" altLang="en-US" sz="1050">
+                <a:solidFill>
+                  <a:srgbClr val="1F2937"/>
+                </a:solidFill>
+                <a:latin typeface="Meiryo UI" pitchFamily="34" charset="0"/>
+                <a:ea typeface="Meiryo UI" pitchFamily="34" charset="-122"/>
+                <a:cs typeface="Meiryo UI" pitchFamily="34" charset="-120"/>
+              </a:rPr>
+              <a:t>主要メーカー２０社の</a:t>
+            </a:r>
+            <a:r>
+              <a:rPr lang="en-US" sz="1050">
+                <a:solidFill>
+                  <a:srgbClr val="1F2937"/>
+                </a:solidFill>
+                <a:latin typeface="Meiryo UI" pitchFamily="34" charset="0"/>
+                <a:ea typeface="Meiryo UI" pitchFamily="34" charset="-122"/>
+                <a:cs typeface="Meiryo UI" pitchFamily="34" charset="-120"/>
+              </a:rPr>
+              <a:t>在庫</a:t>
+            </a:r>
+            <a:r>
               <a:rPr lang="en-US" sz="1050" dirty="0">
                 <a:solidFill>
                   <a:srgbClr val="1F2937"/>
@@ -2895,7 +2917,7 @@
                 <a:ea typeface="Meiryo UI" pitchFamily="34" charset="-122"/>
                 <a:cs typeface="Meiryo UI" pitchFamily="34" charset="-120"/>
               </a:rPr>
-              <a:t>富士フイルム和光純薬・シグマアルドリッチ・メルク等の在庫・納期をWebから自動取得し、問い合わせ作業を削減。</a:t>
+              <a:t>・納期をWebから自動取得し、問い合わせ作業を削減。</a:t>
             </a:r>
             <a:endParaRPr lang="en-US" sz="1050" dirty="0"/>
           </a:p>
@@ -8625,7 +8647,7 @@
               <a:buNone/>
             </a:pPr>
             <a:r>
-              <a:rPr lang="en-US" sz="1300" dirty="0">
+              <a:rPr lang="en-US" sz="1300">
                 <a:solidFill>
                   <a:srgbClr val="FFFFFF"/>
                 </a:solidFill>
@@ -8633,7 +8655,7 @@
                 <a:ea typeface="Meiryo UI" pitchFamily="34" charset="-122"/>
                 <a:cs typeface="Meiryo UI" pitchFamily="34" charset="-120"/>
               </a:rPr>
-              <a:t>info@sagbrain.com</a:t>
+              <a:t>ordia-support@sagbrain.com</a:t>
             </a:r>
             <a:endParaRPr lang="en-US" sz="1300" dirty="0"/>
           </a:p>

--- a/assets/ORDIA_紹介資料.pptx
+++ b/assets/ORDIA_紹介資料.pptx
@@ -15109,7 +15109,29 @@
                 <a:ea typeface="Meiryo UI" pitchFamily="34" charset="-122"/>
                 <a:cs typeface="Meiryo UI" pitchFamily="34" charset="-120"/>
               </a:rPr>
-              <a:t>差別化：マスター統合と基幹システム連携</a:t>
+              <a:t>差別化</a:t>
+            </a:r>
+            <a:r>
+              <a:rPr lang="en-US" sz="2200" b="1">
+                <a:solidFill>
+                  <a:srgbClr val="1E3A5F"/>
+                </a:solidFill>
+                <a:latin typeface="Meiryo UI" pitchFamily="34" charset="0"/>
+                <a:ea typeface="Meiryo UI" pitchFamily="34" charset="-122"/>
+                <a:cs typeface="Meiryo UI" pitchFamily="34" charset="-120"/>
+              </a:rPr>
+              <a:t>：マスター</a:t>
+            </a:r>
+            <a:r>
+              <a:rPr lang="ja-JP" altLang="en-US" sz="2200" b="1">
+                <a:solidFill>
+                  <a:srgbClr val="1E3A5F"/>
+                </a:solidFill>
+                <a:latin typeface="Meiryo UI" pitchFamily="34" charset="0"/>
+                <a:ea typeface="Meiryo UI" pitchFamily="34" charset="-122"/>
+                <a:cs typeface="Meiryo UI" pitchFamily="34" charset="-120"/>
+              </a:rPr>
+              <a:t>突合と基幹システム連携</a:t>
             </a:r>
             <a:endParaRPr lang="en-US" sz="2200" dirty="0"/>
           </a:p>
@@ -15332,7 +15354,51 @@
                 <a:ea typeface="Meiryo UI" pitchFamily="34" charset="-122"/>
                 <a:cs typeface="Meiryo UI" pitchFamily="34" charset="-120"/>
               </a:rPr>
-              <a:t>商品・顧客マスターの統合と、既存の基幹システムとの連携。だから受注業務をまるごと自動化できる。</a:t>
+              <a:t>商品</a:t>
+            </a:r>
+            <a:r>
+              <a:rPr lang="en-US" sz="1300">
+                <a:solidFill>
+                  <a:srgbClr val="1F2937"/>
+                </a:solidFill>
+                <a:latin typeface="Meiryo UI" pitchFamily="34" charset="0"/>
+                <a:ea typeface="Meiryo UI" pitchFamily="34" charset="-122"/>
+                <a:cs typeface="Meiryo UI" pitchFamily="34" charset="-120"/>
+              </a:rPr>
+              <a:t>・顧客</a:t>
+            </a:r>
+            <a:r>
+              <a:rPr lang="ja-JP" altLang="en-US" sz="1300">
+                <a:solidFill>
+                  <a:srgbClr val="1F2937"/>
+                </a:solidFill>
+                <a:latin typeface="Meiryo UI" pitchFamily="34" charset="0"/>
+                <a:ea typeface="Meiryo UI" pitchFamily="34" charset="-122"/>
+                <a:cs typeface="Meiryo UI" pitchFamily="34" charset="-120"/>
+              </a:rPr>
+              <a:t>マスターの突合</a:t>
+            </a:r>
+            <a:r>
+              <a:rPr lang="en-US" sz="1300">
+                <a:solidFill>
+                  <a:srgbClr val="1F2937"/>
+                </a:solidFill>
+                <a:latin typeface="Meiryo UI" pitchFamily="34" charset="0"/>
+                <a:ea typeface="Meiryo UI" pitchFamily="34" charset="-122"/>
+                <a:cs typeface="Meiryo UI" pitchFamily="34" charset="-120"/>
+              </a:rPr>
+              <a:t>と</a:t>
+            </a:r>
+            <a:r>
+              <a:rPr lang="en-US" sz="1300" dirty="0">
+                <a:solidFill>
+                  <a:srgbClr val="1F2937"/>
+                </a:solidFill>
+                <a:latin typeface="Meiryo UI" pitchFamily="34" charset="0"/>
+                <a:ea typeface="Meiryo UI" pitchFamily="34" charset="-122"/>
+                <a:cs typeface="Meiryo UI" pitchFamily="34" charset="-120"/>
+              </a:rPr>
+              <a:t>、既存の基幹システムとの連携。だから受注業務をまるごと自動化できる。</a:t>
             </a:r>
             <a:endParaRPr lang="en-US" sz="1300" dirty="0"/>
           </a:p>
@@ -15416,7 +15482,29 @@
                 <a:ea typeface="Meiryo UI" pitchFamily="34" charset="-122"/>
                 <a:cs typeface="Meiryo UI" pitchFamily="34" charset="-120"/>
               </a:rPr>
-              <a:t>商品・顧客マスターの統合</a:t>
+              <a:t>商品</a:t>
+            </a:r>
+            <a:r>
+              <a:rPr lang="en-US" sz="1600" b="1">
+                <a:solidFill>
+                  <a:srgbClr val="FFFFFF"/>
+                </a:solidFill>
+                <a:latin typeface="Meiryo UI" pitchFamily="34" charset="0"/>
+                <a:ea typeface="Meiryo UI" pitchFamily="34" charset="-122"/>
+                <a:cs typeface="Meiryo UI" pitchFamily="34" charset="-120"/>
+              </a:rPr>
+              <a:t>・顧客</a:t>
+            </a:r>
+            <a:r>
+              <a:rPr lang="ja-JP" altLang="en-US" sz="1600" b="1">
+                <a:solidFill>
+                  <a:srgbClr val="FFFFFF"/>
+                </a:solidFill>
+                <a:latin typeface="Meiryo UI" pitchFamily="34" charset="0"/>
+                <a:ea typeface="Meiryo UI" pitchFamily="34" charset="-122"/>
+                <a:cs typeface="Meiryo UI" pitchFamily="34" charset="-120"/>
+              </a:rPr>
+              <a:t>マスターの突合</a:t>
             </a:r>
             <a:endParaRPr lang="en-US" sz="1600" dirty="0"/>
           </a:p>
@@ -15486,7 +15574,7 @@
               <a:buNone/>
             </a:pPr>
             <a:r>
-              <a:rPr lang="en-US" sz="900" b="1" dirty="0">
+              <a:rPr lang="ja-JP" altLang="en-US" sz="900" b="1">
                 <a:solidFill>
                   <a:srgbClr val="2563EB"/>
                 </a:solidFill>
@@ -15494,7 +15582,7 @@
                 <a:ea typeface="Meiryo UI" pitchFamily="34" charset="-122"/>
                 <a:cs typeface="Meiryo UI" pitchFamily="34" charset="-120"/>
               </a:rPr>
-              <a:t>統合する対象</a:t>
+              <a:t>突合する対象</a:t>
             </a:r>
             <a:endParaRPr lang="en-US" sz="900" dirty="0"/>
           </a:p>
@@ -15603,7 +15691,7 @@
               <a:buNone/>
             </a:pPr>
             <a:r>
-              <a:rPr lang="en-US" sz="950" dirty="0">
+              <a:rPr lang="en-US" sz="950">
                 <a:solidFill>
                   <a:srgbClr val="1F2937"/>
                 </a:solidFill>
@@ -15611,7 +15699,18 @@
                 <a:ea typeface="Meiryo UI" pitchFamily="34" charset="-122"/>
                 <a:cs typeface="Meiryo UI" pitchFamily="34" charset="-120"/>
               </a:rPr>
-              <a:t>AIが受注内容を統合マスターに自動照合</a:t>
+              <a:t>AIが受注内容を</a:t>
+            </a:r>
+            <a:r>
+              <a:rPr lang="ja-JP" altLang="en-US" sz="950">
+                <a:solidFill>
+                  <a:srgbClr val="1F2937"/>
+                </a:solidFill>
+                <a:latin typeface="Meiryo UI" pitchFamily="34" charset="0"/>
+                <a:ea typeface="Meiryo UI" pitchFamily="34" charset="-122"/>
+                <a:cs typeface="Meiryo UI" pitchFamily="34" charset="-120"/>
+              </a:rPr>
+              <a:t>マスターに自動で突合</a:t>
             </a:r>
             <a:endParaRPr lang="en-US" sz="950" dirty="0"/>
           </a:p>
